--- a/doc/xil/CarlaDynoCoupling.pptx
+++ b/doc/xil/CarlaDynoCoupling.pptx
@@ -3511,7 +3511,7 @@
                 </a:solidFill>
                 <a:latin typeface="Consolas"/>
               </a:rPr>
-              <a:t>    THE WALL</a:t>
+              <a:t>    THE WALL — ON 0.9.15</a:t>
             </a:r>
           </a:p>
         </p:txBody>
@@ -3553,7 +3553,7 @@
                 </a:solidFill>
                 <a:latin typeface="Bahnschrift"/>
               </a:rPr>
-              <a:t>What CARLA will and will not tell you</a:t>
+              <a:t>What CARLA 0.9.15 will and will not tell you</a:t>
             </a:r>
           </a:p>
         </p:txBody>
@@ -3595,7 +3595,7 @@
                 </a:solidFill>
                 <a:latin typeface="Segoe UI"/>
               </a:rPr>
-              <a:t>The data exists and is computed every tick. There is simply no way to ask for it.</a:t>
+              <a:t>The data exists and is computed every tick. On 0.9.15 there is no way to ask for it. On 0.9.16 there is — see slide 06.</a:t>
             </a:r>
           </a:p>
         </p:txBody>
@@ -4150,7 +4150,7 @@
                 </a:solidFill>
                 <a:latin typeface="Consolas"/>
               </a:rPr>
-              <a:t>Consequence: Trq_T2W and omega_i are both unavailable. Every design that follows is a way of living with that.</a:t>
+              <a:t>Consequence on 0.9.15: Trq_T2W and omega_i are both unavailable, and the two designs that follow are ways of living with that.</a:t>
             </a:r>
           </a:p>
         </p:txBody>
@@ -6922,7 +6922,7 @@
                 </a:solidFill>
                 <a:latin typeface="Consolas"/>
               </a:rPr>
-              <a:t>    EVIDENCE</a:t>
+              <a:t>    0.9.16 CHANGES THE ANSWER</a:t>
             </a:r>
           </a:p>
         </p:txBody>
@@ -6964,7 +6964,7 @@
                 </a:solidFill>
                 <a:latin typeface="Bahnschrift"/>
               </a:rPr>
-              <a:t>What is measured, what is derived, what is not</a:t>
+              <a:t>get_telemetry_data makes both signals readable</a:t>
             </a:r>
           </a:p>
         </p:txBody>
@@ -7006,896 +7006,21 @@
                 </a:solidFill>
                 <a:latin typeface="Segoe UI"/>
               </a:rPr>
-              <a:t>Taken against a live CARLA 0.9.15 server, or read from the CARLA and UE4/PhysX source trees.</a:t>
-            </a:r>
-          </a:p>
-        </p:txBody>
-      </p:sp>
-      <p:sp>
-        <p:nvSpPr>
-          <p:cNvPr id="6" name="TextBox 5"/>
-          <p:cNvSpPr txBox="1"/>
-          <p:nvPr/>
-        </p:nvSpPr>
-        <p:spPr>
-          <a:xfrm>
-            <a:off x="566928" y="1792224"/>
-            <a:ext cx="8412480" cy="237744"/>
-          </a:xfrm>
-          <a:prstGeom prst="rect">
-            <a:avLst/>
-          </a:prstGeom>
-          <a:noFill/>
-        </p:spPr>
-        <p:txBody>
-          <a:bodyPr wrap="square" lIns="0" rIns="0" tIns="0" bIns="0" anchor="t">
-            <a:spAutoFit/>
-          </a:bodyPr>
-          <a:lstStyle/>
-          <a:p>
-            <a:pPr algn="l">
-              <a:spcBef>
-                <a:spcPts val="0"/>
-              </a:spcBef>
-              <a:spcAft>
-                <a:spcPts val="0"/>
-              </a:spcAft>
-            </a:pPr>
-            <a:r>
-              <a:rPr sz="1000" b="0">
-                <a:solidFill>
-                  <a:srgbClr val="4A5764"/>
-                </a:solidFill>
-                <a:latin typeface="Consolas"/>
-              </a:rPr>
-              <a:t>velocity write rejects external force; residual = one step</a:t>
-            </a:r>
-          </a:p>
-        </p:txBody>
-      </p:sp>
-      <p:sp>
-        <p:nvSpPr>
-          <p:cNvPr id="7" name="TextBox 6"/>
-          <p:cNvSpPr txBox="1"/>
-          <p:nvPr/>
-        </p:nvSpPr>
-        <p:spPr>
-          <a:xfrm>
-            <a:off x="9144000" y="1792224"/>
-            <a:ext cx="2468880" cy="237744"/>
-          </a:xfrm>
-          <a:prstGeom prst="rect">
-            <a:avLst/>
-          </a:prstGeom>
-          <a:noFill/>
-        </p:spPr>
-        <p:txBody>
-          <a:bodyPr wrap="square" lIns="0" rIns="0" tIns="0" bIns="0" anchor="t">
-            <a:spAutoFit/>
-          </a:bodyPr>
-          <a:lstStyle/>
-          <a:p>
-            <a:pPr algn="l">
-              <a:spcBef>
-                <a:spcPts val="0"/>
-              </a:spcBef>
-              <a:spcAft>
-                <a:spcPts val="0"/>
-              </a:spcAft>
-            </a:pPr>
-            <a:r>
-              <a:rPr sz="1000" b="0">
-                <a:solidFill>
-                  <a:srgbClr val="1B646D"/>
-                </a:solidFill>
-                <a:latin typeface="Consolas"/>
-              </a:rPr>
-              <a:t>measured</a:t>
-            </a:r>
-          </a:p>
-        </p:txBody>
-      </p:sp>
-      <p:sp>
-        <p:nvSpPr>
-          <p:cNvPr id="8" name="TextBox 7"/>
-          <p:cNvSpPr txBox="1"/>
-          <p:nvPr/>
-        </p:nvSpPr>
-        <p:spPr>
-          <a:xfrm>
-            <a:off x="566928" y="2066544"/>
-            <a:ext cx="8412480" cy="237744"/>
-          </a:xfrm>
-          <a:prstGeom prst="rect">
-            <a:avLst/>
-          </a:prstGeom>
-          <a:noFill/>
-        </p:spPr>
-        <p:txBody>
-          <a:bodyPr wrap="square" lIns="0" rIns="0" tIns="0" bIns="0" anchor="t">
-            <a:spAutoFit/>
-          </a:bodyPr>
-          <a:lstStyle/>
-          <a:p>
-            <a:pPr algn="l">
-              <a:spcBef>
-                <a:spcPts val="0"/>
-              </a:spcBef>
-              <a:spcAft>
-                <a:spcPts val="0"/>
-              </a:spcAft>
-            </a:pPr>
-            <a:r>
-              <a:rPr sz="1000" b="0">
-                <a:solidFill>
-                  <a:srgbClr val="4A5764"/>
-                </a:solidFill>
-                <a:latin typeface="Consolas"/>
-              </a:rPr>
-              <a:t>velocity write imposes zero sideslip (0.45 vs 21 deg)</a:t>
-            </a:r>
-          </a:p>
-        </p:txBody>
-      </p:sp>
-      <p:sp>
-        <p:nvSpPr>
-          <p:cNvPr id="9" name="TextBox 8"/>
-          <p:cNvSpPr txBox="1"/>
-          <p:nvPr/>
-        </p:nvSpPr>
-        <p:spPr>
-          <a:xfrm>
-            <a:off x="9144000" y="2066544"/>
-            <a:ext cx="2468880" cy="237744"/>
-          </a:xfrm>
-          <a:prstGeom prst="rect">
-            <a:avLst/>
-          </a:prstGeom>
-          <a:noFill/>
-        </p:spPr>
-        <p:txBody>
-          <a:bodyPr wrap="square" lIns="0" rIns="0" tIns="0" bIns="0" anchor="t">
-            <a:spAutoFit/>
-          </a:bodyPr>
-          <a:lstStyle/>
-          <a:p>
-            <a:pPr algn="l">
-              <a:spcBef>
-                <a:spcPts val="0"/>
-              </a:spcBef>
-              <a:spcAft>
-                <a:spcPts val="0"/>
-              </a:spcAft>
-            </a:pPr>
-            <a:r>
-              <a:rPr sz="1000" b="0">
-                <a:solidFill>
-                  <a:srgbClr val="1B646D"/>
-                </a:solidFill>
-                <a:latin typeface="Consolas"/>
-              </a:rPr>
-              <a:t>measured</a:t>
-            </a:r>
-          </a:p>
-        </p:txBody>
-      </p:sp>
-      <p:sp>
-        <p:nvSpPr>
-          <p:cNvPr id="10" name="TextBox 9"/>
-          <p:cNvSpPr txBox="1"/>
-          <p:nvPr/>
-        </p:nvSpPr>
-        <p:spPr>
-          <a:xfrm>
-            <a:off x="566928" y="2340864"/>
-            <a:ext cx="8412480" cy="237744"/>
-          </a:xfrm>
-          <a:prstGeom prst="rect">
-            <a:avLst/>
-          </a:prstGeom>
-          <a:noFill/>
-        </p:spPr>
-        <p:txBody>
-          <a:bodyPr wrap="square" lIns="0" rIns="0" tIns="0" bIns="0" anchor="t">
-            <a:spAutoFit/>
-          </a:bodyPr>
-          <a:lstStyle/>
-          <a:p>
-            <a:pPr algn="l">
-              <a:spcBef>
-                <a:spcPts val="0"/>
-              </a:spcBef>
-              <a:spcAft>
-                <a:spcPts val="0"/>
-              </a:spcAft>
-            </a:pPr>
-            <a:r>
-              <a:rPr sz="1000" b="0">
-                <a:solidFill>
-                  <a:srgbClr val="4A5764"/>
-                </a:solidFill>
-                <a:latin typeface="Consolas"/>
-              </a:rPr>
-              <a:t>enable_constant_velocity latched + body frame</a:t>
-            </a:r>
-          </a:p>
-        </p:txBody>
-      </p:sp>
-      <p:sp>
-        <p:nvSpPr>
-          <p:cNvPr id="11" name="TextBox 10"/>
-          <p:cNvSpPr txBox="1"/>
-          <p:nvPr/>
-        </p:nvSpPr>
-        <p:spPr>
-          <a:xfrm>
-            <a:off x="9144000" y="2340864"/>
-            <a:ext cx="2468880" cy="237744"/>
-          </a:xfrm>
-          <a:prstGeom prst="rect">
-            <a:avLst/>
-          </a:prstGeom>
-          <a:noFill/>
-        </p:spPr>
-        <p:txBody>
-          <a:bodyPr wrap="square" lIns="0" rIns="0" tIns="0" bIns="0" anchor="t">
-            <a:spAutoFit/>
-          </a:bodyPr>
-          <a:lstStyle/>
-          <a:p>
-            <a:pPr algn="l">
-              <a:spcBef>
-                <a:spcPts val="0"/>
-              </a:spcBef>
-              <a:spcAft>
-                <a:spcPts val="0"/>
-              </a:spcAft>
-            </a:pPr>
-            <a:r>
-              <a:rPr sz="1000" b="0">
-                <a:solidFill>
-                  <a:srgbClr val="1B646D"/>
-                </a:solidFill>
-                <a:latin typeface="Consolas"/>
-              </a:rPr>
-              <a:t>measured</a:t>
-            </a:r>
-          </a:p>
-        </p:txBody>
-      </p:sp>
-      <p:sp>
-        <p:nvSpPr>
-          <p:cNvPr id="12" name="TextBox 11"/>
-          <p:cNvSpPr txBox="1"/>
-          <p:nvPr/>
-        </p:nvSpPr>
-        <p:spPr>
-          <a:xfrm>
-            <a:off x="566928" y="2615184"/>
-            <a:ext cx="8412480" cy="237744"/>
-          </a:xfrm>
-          <a:prstGeom prst="rect">
-            <a:avLst/>
-          </a:prstGeom>
-          <a:noFill/>
-        </p:spPr>
-        <p:txBody>
-          <a:bodyPr wrap="square" lIns="0" rIns="0" tIns="0" bIns="0" anchor="t">
-            <a:spAutoFit/>
-          </a:bodyPr>
-          <a:lstStyle/>
-          <a:p>
-            <a:pPr algn="l">
-              <a:spcBef>
-                <a:spcPts val="0"/>
-              </a:spcBef>
-              <a:spcAft>
-                <a:spcPts val="0"/>
-              </a:spcAft>
-            </a:pPr>
-            <a:r>
-              <a:rPr sz="1000" b="0">
-                <a:solidFill>
-                  <a:srgbClr val="4A5764"/>
-                </a:solidFill>
-                <a:latin typeface="Consolas"/>
-              </a:rPr>
-              <a:t>apply_physics_control resets state (15.00 -&gt; 0.02 m/s)</a:t>
-            </a:r>
-          </a:p>
-        </p:txBody>
-      </p:sp>
-      <p:sp>
-        <p:nvSpPr>
-          <p:cNvPr id="13" name="TextBox 12"/>
-          <p:cNvSpPr txBox="1"/>
-          <p:nvPr/>
-        </p:nvSpPr>
-        <p:spPr>
-          <a:xfrm>
-            <a:off x="9144000" y="2615184"/>
-            <a:ext cx="2468880" cy="237744"/>
-          </a:xfrm>
-          <a:prstGeom prst="rect">
-            <a:avLst/>
-          </a:prstGeom>
-          <a:noFill/>
-        </p:spPr>
-        <p:txBody>
-          <a:bodyPr wrap="square" lIns="0" rIns="0" tIns="0" bIns="0" anchor="t">
-            <a:spAutoFit/>
-          </a:bodyPr>
-          <a:lstStyle/>
-          <a:p>
-            <a:pPr algn="l">
-              <a:spcBef>
-                <a:spcPts val="0"/>
-              </a:spcBef>
-              <a:spcAft>
-                <a:spcPts val="0"/>
-              </a:spcAft>
-            </a:pPr>
-            <a:r>
-              <a:rPr sz="1000" b="0">
-                <a:solidFill>
-                  <a:srgbClr val="1B646D"/>
-                </a:solidFill>
-                <a:latin typeface="Consolas"/>
-              </a:rPr>
-              <a:t>measured</a:t>
-            </a:r>
-          </a:p>
-        </p:txBody>
-      </p:sp>
-      <p:sp>
-        <p:nvSpPr>
-          <p:cNvPr id="14" name="TextBox 13"/>
-          <p:cNvSpPr txBox="1"/>
-          <p:nvPr/>
-        </p:nvSpPr>
-        <p:spPr>
-          <a:xfrm>
-            <a:off x="566928" y="2889504"/>
-            <a:ext cx="8412480" cy="237744"/>
-          </a:xfrm>
-          <a:prstGeom prst="rect">
-            <a:avLst/>
-          </a:prstGeom>
-          <a:noFill/>
-        </p:spPr>
-        <p:txBody>
-          <a:bodyPr wrap="square" lIns="0" rIns="0" tIns="0" bIns="0" anchor="t">
-            <a:spAutoFit/>
-          </a:bodyPr>
-          <a:lstStyle/>
-          <a:p>
-            <a:pPr algn="l">
-              <a:spcBef>
-                <a:spcPts val="0"/>
-              </a:spcBef>
-              <a:spcAft>
-                <a:spcPts val="0"/>
-              </a:spcAft>
-            </a:pPr>
-            <a:r>
-              <a:rPr sz="1000" b="0">
-                <a:solidFill>
-                  <a:srgbClr val="4A5764"/>
-                </a:solidFill>
-                <a:latin typeface="Consolas"/>
-              </a:rPr>
-              <a:t>add_force acts at COM, dead from rest, inverts slip sign</a:t>
-            </a:r>
-          </a:p>
-        </p:txBody>
-      </p:sp>
-      <p:sp>
-        <p:nvSpPr>
-          <p:cNvPr id="15" name="TextBox 14"/>
-          <p:cNvSpPr txBox="1"/>
-          <p:nvPr/>
-        </p:nvSpPr>
-        <p:spPr>
-          <a:xfrm>
-            <a:off x="9144000" y="2889504"/>
-            <a:ext cx="2468880" cy="237744"/>
-          </a:xfrm>
-          <a:prstGeom prst="rect">
-            <a:avLst/>
-          </a:prstGeom>
-          <a:noFill/>
-        </p:spPr>
-        <p:txBody>
-          <a:bodyPr wrap="square" lIns="0" rIns="0" tIns="0" bIns="0" anchor="t">
-            <a:spAutoFit/>
-          </a:bodyPr>
-          <a:lstStyle/>
-          <a:p>
-            <a:pPr algn="l">
-              <a:spcBef>
-                <a:spcPts val="0"/>
-              </a:spcBef>
-              <a:spcAft>
-                <a:spcPts val="0"/>
-              </a:spcAft>
-            </a:pPr>
-            <a:r>
-              <a:rPr sz="1000" b="0">
-                <a:solidFill>
-                  <a:srgbClr val="1B646D"/>
-                </a:solidFill>
-                <a:latin typeface="Consolas"/>
-              </a:rPr>
-              <a:t>measured</a:t>
-            </a:r>
-          </a:p>
-        </p:txBody>
-      </p:sp>
-      <p:sp>
-        <p:nvSpPr>
-          <p:cNvPr id="16" name="TextBox 15"/>
-          <p:cNvSpPr txBox="1"/>
-          <p:nvPr/>
-        </p:nvSpPr>
-        <p:spPr>
-          <a:xfrm>
-            <a:off x="566928" y="3163824"/>
-            <a:ext cx="8412480" cy="237744"/>
-          </a:xfrm>
-          <a:prstGeom prst="rect">
-            <a:avLst/>
-          </a:prstGeom>
-          <a:noFill/>
-        </p:spPr>
-        <p:txBody>
-          <a:bodyPr wrap="square" lIns="0" rIns="0" tIns="0" bIns="0" anchor="t">
-            <a:spAutoFit/>
-          </a:bodyPr>
-          <a:lstStyle/>
-          <a:p>
-            <a:pPr algn="l">
-              <a:spcBef>
-                <a:spcPts val="0"/>
-              </a:spcBef>
-              <a:spcAft>
-                <a:spcPts val="0"/>
-              </a:spcAft>
-            </a:pPr>
-            <a:r>
-              <a:rPr sz="1000" b="0">
-                <a:solidFill>
-                  <a:srgbClr val="4A5764"/>
-                </a:solidFill>
-                <a:latin typeface="Consolas"/>
-              </a:rPr>
-              <a:t>stock pedal map non-linear (47%) / flattened linear (2.7%)</a:t>
-            </a:r>
-          </a:p>
-        </p:txBody>
-      </p:sp>
-      <p:sp>
-        <p:nvSpPr>
-          <p:cNvPr id="17" name="TextBox 16"/>
-          <p:cNvSpPr txBox="1"/>
-          <p:nvPr/>
-        </p:nvSpPr>
-        <p:spPr>
-          <a:xfrm>
-            <a:off x="9144000" y="3163824"/>
-            <a:ext cx="2468880" cy="237744"/>
-          </a:xfrm>
-          <a:prstGeom prst="rect">
-            <a:avLst/>
-          </a:prstGeom>
-          <a:noFill/>
-        </p:spPr>
-        <p:txBody>
-          <a:bodyPr wrap="square" lIns="0" rIns="0" tIns="0" bIns="0" anchor="t">
-            <a:spAutoFit/>
-          </a:bodyPr>
-          <a:lstStyle/>
-          <a:p>
-            <a:pPr algn="l">
-              <a:spcBef>
-                <a:spcPts val="0"/>
-              </a:spcBef>
-              <a:spcAft>
-                <a:spcPts val="0"/>
-              </a:spcAft>
-            </a:pPr>
-            <a:r>
-              <a:rPr sz="1000" b="0">
-                <a:solidFill>
-                  <a:srgbClr val="1B646D"/>
-                </a:solidFill>
-                <a:latin typeface="Consolas"/>
-              </a:rPr>
-              <a:t>measured</a:t>
-            </a:r>
-          </a:p>
-        </p:txBody>
-      </p:sp>
-      <p:sp>
-        <p:nvSpPr>
-          <p:cNvPr id="18" name="TextBox 17"/>
-          <p:cNvSpPr txBox="1"/>
-          <p:nvPr/>
-        </p:nvSpPr>
-        <p:spPr>
-          <a:xfrm>
-            <a:off x="566928" y="3438144"/>
-            <a:ext cx="8412480" cy="237744"/>
-          </a:xfrm>
-          <a:prstGeom prst="rect">
-            <a:avLst/>
-          </a:prstGeom>
-          <a:noFill/>
-        </p:spPr>
-        <p:txBody>
-          <a:bodyPr wrap="square" lIns="0" rIns="0" tIns="0" bIns="0" anchor="t">
-            <a:spAutoFit/>
-          </a:bodyPr>
-          <a:lstStyle/>
-          <a:p>
-            <a:pPr algn="l">
-              <a:spcBef>
-                <a:spcPts val="0"/>
-              </a:spcBef>
-              <a:spcAft>
-                <a:spcPts val="0"/>
-              </a:spcAft>
-            </a:pPr>
-            <a:r>
-              <a:rPr sz="1000" b="0">
-                <a:solidFill>
-                  <a:srgbClr val="4A5764"/>
-                </a:solidFill>
-                <a:latin typeface="Consolas"/>
-              </a:rPr>
-              <a:t>J_w = 0.5 * 20 * r^2 = 1.369 kg m^2</a:t>
-            </a:r>
-          </a:p>
-        </p:txBody>
-      </p:sp>
-      <p:sp>
-        <p:nvSpPr>
-          <p:cNvPr id="19" name="TextBox 18"/>
-          <p:cNvSpPr txBox="1"/>
-          <p:nvPr/>
-        </p:nvSpPr>
-        <p:spPr>
-          <a:xfrm>
-            <a:off x="9144000" y="3438144"/>
-            <a:ext cx="2468880" cy="237744"/>
-          </a:xfrm>
-          <a:prstGeom prst="rect">
-            <a:avLst/>
-          </a:prstGeom>
-          <a:noFill/>
-        </p:spPr>
-        <p:txBody>
-          <a:bodyPr wrap="square" lIns="0" rIns="0" tIns="0" bIns="0" anchor="t">
-            <a:spAutoFit/>
-          </a:bodyPr>
-          <a:lstStyle/>
-          <a:p>
-            <a:pPr algn="l">
-              <a:spcBef>
-                <a:spcPts val="0"/>
-              </a:spcBef>
-              <a:spcAft>
-                <a:spcPts val="0"/>
-              </a:spcAft>
-            </a:pPr>
-            <a:r>
-              <a:rPr sz="1000" b="0">
-                <a:solidFill>
-                  <a:srgbClr val="1B646D"/>
-                </a:solidFill>
-                <a:latin typeface="Consolas"/>
-              </a:rPr>
-              <a:t>measured, 1.1%</a:t>
-            </a:r>
-          </a:p>
-        </p:txBody>
-      </p:sp>
-      <p:sp>
-        <p:nvSpPr>
-          <p:cNvPr id="20" name="TextBox 19"/>
-          <p:cNvSpPr txBox="1"/>
-          <p:nvPr/>
-        </p:nvSpPr>
-        <p:spPr>
-          <a:xfrm>
-            <a:off x="566928" y="3712464"/>
-            <a:ext cx="8412480" cy="237744"/>
-          </a:xfrm>
-          <a:prstGeom prst="rect">
-            <a:avLst/>
-          </a:prstGeom>
-          <a:noFill/>
-        </p:spPr>
-        <p:txBody>
-          <a:bodyPr wrap="square" lIns="0" rIns="0" tIns="0" bIns="0" anchor="t">
-            <a:spAutoFit/>
-          </a:bodyPr>
-          <a:lstStyle/>
-          <a:p>
-            <a:pPr algn="l">
-              <a:spcBef>
-                <a:spcPts val="0"/>
-              </a:spcBef>
-              <a:spcAft>
-                <a:spcPts val="0"/>
-              </a:spcAft>
-            </a:pPr>
-            <a:r>
-              <a:rPr sz="1000" b="0">
-                <a:solidFill>
-                  <a:srgbClr val="4A5764"/>
-                </a:solidFill>
-                <a:latin typeface="Consolas"/>
-              </a:rPr>
-              <a:t>wheel re-sync tau = 3.4e-4 * v</a:t>
-            </a:r>
-          </a:p>
-        </p:txBody>
-      </p:sp>
-      <p:sp>
-        <p:nvSpPr>
-          <p:cNvPr id="21" name="TextBox 20"/>
-          <p:cNvSpPr txBox="1"/>
-          <p:nvPr/>
-        </p:nvSpPr>
-        <p:spPr>
-          <a:xfrm>
-            <a:off x="9144000" y="3712464"/>
-            <a:ext cx="2468880" cy="237744"/>
-          </a:xfrm>
-          <a:prstGeom prst="rect">
-            <a:avLst/>
-          </a:prstGeom>
-          <a:noFill/>
-        </p:spPr>
-        <p:txBody>
-          <a:bodyPr wrap="square" lIns="0" rIns="0" tIns="0" bIns="0" anchor="t">
-            <a:spAutoFit/>
-          </a:bodyPr>
-          <a:lstStyle/>
-          <a:p>
-            <a:pPr algn="l">
-              <a:spcBef>
-                <a:spcPts val="0"/>
-              </a:spcBef>
-              <a:spcAft>
-                <a:spcPts val="0"/>
-              </a:spcAft>
-            </a:pPr>
-            <a:r>
-              <a:rPr sz="1000" b="0">
-                <a:solidFill>
-                  <a:srgbClr val="A9611A"/>
-                </a:solidFill>
-                <a:latin typeface="Consolas"/>
-              </a:rPr>
-              <a:t>derived</a:t>
-            </a:r>
-          </a:p>
-        </p:txBody>
-      </p:sp>
-      <p:sp>
-        <p:nvSpPr>
-          <p:cNvPr id="22" name="TextBox 21"/>
-          <p:cNvSpPr txBox="1"/>
-          <p:nvPr/>
-        </p:nvSpPr>
-        <p:spPr>
-          <a:xfrm>
-            <a:off x="566928" y="3986784"/>
-            <a:ext cx="8412480" cy="237744"/>
-          </a:xfrm>
-          <a:prstGeom prst="rect">
-            <a:avLst/>
-          </a:prstGeom>
-          <a:noFill/>
-        </p:spPr>
-        <p:txBody>
-          <a:bodyPr wrap="square" lIns="0" rIns="0" tIns="0" bIns="0" anchor="t">
-            <a:spAutoFit/>
-          </a:bodyPr>
-          <a:lstStyle/>
-          <a:p>
-            <a:pPr algn="l">
-              <a:spcBef>
-                <a:spcPts val="0"/>
-              </a:spcBef>
-              <a:spcAft>
-                <a:spcPts val="0"/>
-              </a:spcAft>
-            </a:pPr>
-            <a:r>
-              <a:rPr sz="1000" b="0">
-                <a:solidFill>
-                  <a:srgbClr val="4A5764"/>
-                </a:solidFill>
-                <a:latin typeface="Consolas"/>
-              </a:rPr>
-              <a:t>Fres form, from UpdateDrag</a:t>
-            </a:r>
-          </a:p>
-        </p:txBody>
-      </p:sp>
-      <p:sp>
-        <p:nvSpPr>
-          <p:cNvPr id="23" name="TextBox 22"/>
-          <p:cNvSpPr txBox="1"/>
-          <p:nvPr/>
-        </p:nvSpPr>
-        <p:spPr>
-          <a:xfrm>
-            <a:off x="9144000" y="3986784"/>
-            <a:ext cx="2468880" cy="237744"/>
-          </a:xfrm>
-          <a:prstGeom prst="rect">
-            <a:avLst/>
-          </a:prstGeom>
-          <a:noFill/>
-        </p:spPr>
-        <p:txBody>
-          <a:bodyPr wrap="square" lIns="0" rIns="0" tIns="0" bIns="0" anchor="t">
-            <a:spAutoFit/>
-          </a:bodyPr>
-          <a:lstStyle/>
-          <a:p>
-            <a:pPr algn="l">
-              <a:spcBef>
-                <a:spcPts val="0"/>
-              </a:spcBef>
-              <a:spcAft>
-                <a:spcPts val="0"/>
-              </a:spcAft>
-            </a:pPr>
-            <a:r>
-              <a:rPr sz="1000" b="0">
-                <a:solidFill>
-                  <a:srgbClr val="A9611A"/>
-                </a:solidFill>
-                <a:latin typeface="Consolas"/>
-              </a:rPr>
-              <a:t>from source</a:t>
-            </a:r>
-          </a:p>
-        </p:txBody>
-      </p:sp>
-      <p:sp>
-        <p:nvSpPr>
-          <p:cNvPr id="24" name="TextBox 23"/>
-          <p:cNvSpPr txBox="1"/>
-          <p:nvPr/>
-        </p:nvSpPr>
-        <p:spPr>
-          <a:xfrm>
-            <a:off x="566928" y="4261104"/>
-            <a:ext cx="8412480" cy="237744"/>
-          </a:xfrm>
-          <a:prstGeom prst="rect">
-            <a:avLst/>
-          </a:prstGeom>
-          <a:noFill/>
-        </p:spPr>
-        <p:txBody>
-          <a:bodyPr wrap="square" lIns="0" rIns="0" tIns="0" bIns="0" anchor="t">
-            <a:spAutoFit/>
-          </a:bodyPr>
-          <a:lstStyle/>
-          <a:p>
-            <a:pPr algn="l">
-              <a:spcBef>
-                <a:spcPts val="0"/>
-              </a:spcBef>
-              <a:spcAft>
-                <a:spcPts val="0"/>
-              </a:spcAft>
-            </a:pPr>
-            <a:r>
-              <a:rPr sz="1000" b="0">
-                <a:solidFill>
-                  <a:srgbClr val="4A5764"/>
-                </a:solidFill>
-                <a:latin typeface="Consolas"/>
-              </a:rPr>
-              <a:t>drag area = 2.52 m^2 (UE4 defaults, absent from assets)</a:t>
-            </a:r>
-          </a:p>
-        </p:txBody>
-      </p:sp>
-      <p:sp>
-        <p:nvSpPr>
-          <p:cNvPr id="25" name="TextBox 24"/>
-          <p:cNvSpPr txBox="1"/>
-          <p:nvPr/>
-        </p:nvSpPr>
-        <p:spPr>
-          <a:xfrm>
-            <a:off x="9144000" y="4261104"/>
-            <a:ext cx="2468880" cy="237744"/>
-          </a:xfrm>
-          <a:prstGeom prst="rect">
-            <a:avLst/>
-          </a:prstGeom>
-          <a:noFill/>
-        </p:spPr>
-        <p:txBody>
-          <a:bodyPr wrap="square" lIns="0" rIns="0" tIns="0" bIns="0" anchor="t">
-            <a:spAutoFit/>
-          </a:bodyPr>
-          <a:lstStyle/>
-          <a:p>
-            <a:pPr algn="l">
-              <a:spcBef>
-                <a:spcPts val="0"/>
-              </a:spcBef>
-              <a:spcAft>
-                <a:spcPts val="0"/>
-              </a:spcAft>
-            </a:pPr>
-            <a:r>
-              <a:rPr sz="1000" b="1">
-                <a:solidFill>
-                  <a:srgbClr val="933723"/>
-                </a:solidFill>
-                <a:latin typeface="Consolas"/>
-              </a:rPr>
-              <a:t>UNVERIFIED</a:t>
-            </a:r>
-          </a:p>
-        </p:txBody>
-      </p:sp>
-      <p:cxnSp>
-        <p:nvCxnSpPr>
-          <p:cNvPr id="26" name="Connector 25"/>
-          <p:cNvCxnSpPr/>
-          <p:nvPr/>
-        </p:nvCxnSpPr>
-        <p:spPr>
-          <a:xfrm>
-            <a:off x="566928" y="4626864"/>
-            <a:ext cx="11064240" cy="0"/>
-          </a:xfrm>
-          <a:prstGeom prst="line">
-            <a:avLst/>
-          </a:prstGeom>
-          <a:ln w="12700">
-            <a:solidFill>
-              <a:srgbClr val="C7CED5"/>
-            </a:solidFill>
-          </a:ln>
-        </p:spPr>
-        <p:style>
-          <a:lnRef idx="2">
-            <a:schemeClr val="accent1"/>
-          </a:lnRef>
-          <a:fillRef idx="0">
-            <a:schemeClr val="accent1"/>
-          </a:fillRef>
-          <a:effectRef idx="1">
-            <a:schemeClr val="accent1"/>
-          </a:effectRef>
-          <a:fontRef idx="minor">
-            <a:schemeClr val="tx1"/>
-          </a:fontRef>
-        </p:style>
-      </p:cxnSp>
-      <p:sp>
-        <p:nvSpPr>
-          <p:cNvPr id="27" name="Rectangle 26"/>
+              <a:t>We are on 0.9.15.2. Everything on slides 02 and 04 exists to work around a signal that the next release exposes directly.</a:t>
+            </a:r>
+          </a:p>
+        </p:txBody>
+      </p:sp>
+      <p:sp>
+        <p:nvSpPr>
+          <p:cNvPr id="6" name="Rectangle 5"/>
           <p:cNvSpPr/>
           <p:nvPr/>
         </p:nvSpPr>
         <p:spPr>
           <a:xfrm>
-            <a:off x="566928" y="4773168"/>
-            <a:ext cx="5394960" cy="1097280"/>
+            <a:off x="566928" y="1792224"/>
+            <a:ext cx="11064240" cy="1481328"/>
           </a:xfrm>
           <a:prstGeom prst="rect">
             <a:avLst/>
@@ -7903,7 +7028,7 @@
           <a:solidFill>
             <a:srgbClr val="D9E9EA"/>
           </a:solidFill>
-          <a:ln w="19050">
+          <a:ln w="25400">
             <a:solidFill>
               <a:srgbClr val="1B646D"/>
             </a:solidFill>
@@ -7928,7 +7053,163 @@
           <a:bodyPr rtlCol="0" anchor="t" wrap="square" tIns="54864" bIns="54864"/>
           <a:lstStyle/>
           <a:p>
-            <a:pPr algn="ctr">
+            <a:pPr algn="l">
+              <a:spcBef>
+                <a:spcPts val="0"/>
+              </a:spcBef>
+              <a:spcAft>
+                <a:spcPts val="0"/>
+              </a:spcAft>
+            </a:pPr>
+            <a:r>
+              <a:rPr sz="1050" b="1">
+                <a:solidFill>
+                  <a:srgbClr val="1B646D"/>
+                </a:solidFill>
+                <a:latin typeface="Consolas"/>
+              </a:rPr>
+              <a:t>carla.WheelTelemetryData      -- per wheel, read-only, no HUD needed</a:t>
+            </a:r>
+          </a:p>
+          <a:p>
+            <a:pPr algn="l">
+              <a:spcBef>
+                <a:spcPts val="200"/>
+              </a:spcBef>
+              <a:spcAft>
+                <a:spcPts val="0"/>
+              </a:spcAft>
+            </a:pPr>
+            <a:r>
+              <a:rPr sz="1000" b="0">
+                <a:solidFill>
+                  <a:srgbClr val="111820"/>
+                </a:solidFill>
+                <a:latin typeface="Consolas"/>
+              </a:rPr>
+              <a:t>omega        &lt;- WHEEL SPEED          tire_load    &lt;- Fz</a:t>
+            </a:r>
+          </a:p>
+          <a:p>
+            <a:pPr algn="l">
+              <a:spcBef>
+                <a:spcPts val="200"/>
+              </a:spcBef>
+              <a:spcAft>
+                <a:spcPts val="0"/>
+              </a:spcAft>
+            </a:pPr>
+            <a:r>
+              <a:rPr sz="1000" b="0">
+                <a:solidFill>
+                  <a:srgbClr val="111820"/>
+                </a:solidFill>
+                <a:latin typeface="Consolas"/>
+              </a:rPr>
+              <a:t>torque       &lt;- Trq_T2W              long_force   &lt;- Fx</a:t>
+            </a:r>
+          </a:p>
+          <a:p>
+            <a:pPr algn="l">
+              <a:spcBef>
+                <a:spcPts val="200"/>
+              </a:spcBef>
+              <a:spcAft>
+                <a:spcPts val="0"/>
+              </a:spcAft>
+            </a:pPr>
+            <a:r>
+              <a:rPr sz="1000" b="0">
+                <a:solidFill>
+                  <a:srgbClr val="111820"/>
+                </a:solidFill>
+                <a:latin typeface="Consolas"/>
+              </a:rPr>
+              <a:t>long_slip    &lt;- kappa                lat_force    &lt;- Fy</a:t>
+            </a:r>
+          </a:p>
+          <a:p>
+            <a:pPr algn="l">
+              <a:spcBef>
+                <a:spcPts val="200"/>
+              </a:spcBef>
+              <a:spcAft>
+                <a:spcPts val="0"/>
+              </a:spcAft>
+            </a:pPr>
+            <a:r>
+              <a:rPr sz="1000" b="0">
+                <a:solidFill>
+                  <a:srgbClr val="111820"/>
+                </a:solidFill>
+                <a:latin typeface="Consolas"/>
+              </a:rPr>
+              <a:t>lat_slip     &lt;- alpha                tire_friction, normalised forms</a:t>
+            </a:r>
+          </a:p>
+          <a:p>
+            <a:pPr algn="l">
+              <a:spcBef>
+                <a:spcPts val="200"/>
+              </a:spcBef>
+              <a:spcAft>
+                <a:spcPts val="0"/>
+              </a:spcAft>
+            </a:pPr>
+            <a:r>
+              <a:rPr sz="1000" b="0">
+                <a:solidFill>
+                  <a:srgbClr val="111820"/>
+                </a:solidFill>
+                <a:latin typeface="Consolas"/>
+              </a:rPr>
+              <a:t/>
+            </a:r>
+          </a:p>
+          <a:p>
+            <a:pPr algn="l">
+              <a:spcBef>
+                <a:spcPts val="200"/>
+              </a:spcBef>
+              <a:spcAft>
+                <a:spcPts val="0"/>
+              </a:spcAft>
+            </a:pPr>
+            <a:r>
+              <a:rPr sz="1000" b="0">
+                <a:solidFill>
+                  <a:srgbClr val="111820"/>
+                </a:solidFill>
+                <a:latin typeface="Consolas"/>
+              </a:rPr>
+              <a:t>VehicleTelemetryData:  speed  steer  throttle  brake  engine_rpm  gear  drag</a:t>
+            </a:r>
+          </a:p>
+        </p:txBody>
+      </p:sp>
+      <p:sp>
+        <p:nvSpPr>
+          <p:cNvPr id="7" name="TextBox 6"/>
+          <p:cNvSpPr txBox="1"/>
+          <p:nvPr/>
+        </p:nvSpPr>
+        <p:spPr>
+          <a:xfrm>
+            <a:off x="566928" y="3419856"/>
+            <a:ext cx="5486400" cy="256032"/>
+          </a:xfrm>
+          <a:prstGeom prst="rect">
+            <a:avLst/>
+          </a:prstGeom>
+          <a:noFill/>
+        </p:spPr>
+        <p:txBody>
+          <a:bodyPr wrap="square" lIns="0" rIns="0" tIns="0" bIns="0" anchor="t">
+            <a:spAutoFit/>
+          </a:bodyPr>
+          <a:lstStyle/>
+          <a:p>
+            <a:pPr algn="l">
               <a:spcBef>
                 <a:spcPts val="0"/>
               </a:spcBef>
@@ -7943,13 +7224,36 @@
                 </a:solidFill>
                 <a:latin typeface="Bahnschrift"/>
               </a:rPr>
-              <a:t>RECOMMENDATION</a:t>
-            </a:r>
-          </a:p>
-          <a:p>
-            <a:pPr>
-              <a:spcBef>
-                <a:spcPts val="300"/>
+              <a:t>WHAT IT RETIRES</a:t>
+            </a:r>
+          </a:p>
+        </p:txBody>
+      </p:sp>
+      <p:sp>
+        <p:nvSpPr>
+          <p:cNvPr id="8" name="TextBox 7"/>
+          <p:cNvSpPr txBox="1"/>
+          <p:nvPr/>
+        </p:nvSpPr>
+        <p:spPr>
+          <a:xfrm>
+            <a:off x="566928" y="3694176"/>
+            <a:ext cx="5577840" cy="1188720"/>
+          </a:xfrm>
+          <a:prstGeom prst="rect">
+            <a:avLst/>
+          </a:prstGeom>
+          <a:noFill/>
+        </p:spPr>
+        <p:txBody>
+          <a:bodyPr wrap="square" lIns="0" rIns="0" tIns="0" bIns="0" anchor="t">
+            <a:spAutoFit/>
+          </a:bodyPr>
+          <a:lstStyle/>
+          <a:p>
+            <a:pPr algn="l">
+              <a:spcBef>
+                <a:spcPts val="0"/>
               </a:spcBef>
               <a:spcAft>
                 <a:spcPts val="0"/>
@@ -7962,13 +7266,13 @@
                 </a:solidFill>
                 <a:latin typeface="Consolas"/>
               </a:rPr>
-              <a:t>Design A, with enable_constant_velocity.</a:t>
-            </a:r>
-          </a:p>
-          <a:p>
-            <a:pPr>
-              <a:spcBef>
-                <a:spcPts val="100"/>
+              <a:t>the vdot inverse -- read torque directly</a:t>
+            </a:r>
+          </a:p>
+          <a:p>
+            <a:pPr algn="l">
+              <a:spcBef>
+                <a:spcPts val="0"/>
               </a:spcBef>
               <a:spcAft>
                 <a:spcPts val="0"/>
@@ -7981,13 +7285,13 @@
                 </a:solidFill>
                 <a:latin typeface="Consolas"/>
               </a:rPr>
-              <a:t>CARLA's aero is a fixed 2.52 m^2 box and its</a:t>
-            </a:r>
-          </a:p>
-          <a:p>
-            <a:pPr>
-              <a:spcBef>
-                <a:spcPts val="100"/>
+              <a:t>the unverified 2.52 m^2 drag area -- drag is reported</a:t>
+            </a:r>
+          </a:p>
+          <a:p>
+            <a:pPr algn="l">
+              <a:spcBef>
+                <a:spcPts val="0"/>
               </a:spcBef>
               <a:spcAft>
                 <a:spcPts val="0"/>
@@ -8000,13 +7304,13 @@
                 </a:solidFill>
                 <a:latin typeface="Consolas"/>
               </a:rPr>
-              <a:t>tire has no relaxation -- little is gained by</a:t>
-            </a:r>
-          </a:p>
-          <a:p>
-            <a:pPr>
-              <a:spcBef>
-                <a:spcPts val="100"/>
+              <a:t>per-wheel READ needing a fork -- telemetry is per wheel</a:t>
+            </a:r>
+          </a:p>
+          <a:p>
+            <a:pPr algn="l">
+              <a:spcBef>
+                <a:spcPts val="0"/>
               </a:spcBef>
               <a:spcAft>
                 <a:spcPts val="0"/>
@@ -8019,31 +7323,191 @@
                 </a:solidFill>
                 <a:latin typeface="Consolas"/>
               </a:rPr>
-              <a:t>putting its longitudinal physics in the loop.</a:t>
-            </a:r>
-          </a:p>
-        </p:txBody>
-      </p:sp>
-      <p:sp>
-        <p:nvSpPr>
-          <p:cNvPr id="28" name="Rectangle 27"/>
+              <a:t>open items C-1, C-3, C-4, C-5</a:t>
+            </a:r>
+          </a:p>
+        </p:txBody>
+      </p:sp>
+      <p:sp>
+        <p:nvSpPr>
+          <p:cNvPr id="9" name="TextBox 8"/>
+          <p:cNvSpPr txBox="1"/>
+          <p:nvPr/>
+        </p:nvSpPr>
+        <p:spPr>
+          <a:xfrm>
+            <a:off x="6309360" y="3419856"/>
+            <a:ext cx="5486400" cy="256032"/>
+          </a:xfrm>
+          <a:prstGeom prst="rect">
+            <a:avLst/>
+          </a:prstGeom>
+          <a:noFill/>
+        </p:spPr>
+        <p:txBody>
+          <a:bodyPr wrap="square" lIns="0" rIns="0" tIns="0" bIns="0" anchor="t">
+            <a:spAutoFit/>
+          </a:bodyPr>
+          <a:lstStyle/>
+          <a:p>
+            <a:pPr algn="l">
+              <a:spcBef>
+                <a:spcPts val="0"/>
+              </a:spcBef>
+              <a:spcAft>
+                <a:spcPts val="0"/>
+              </a:spcAft>
+            </a:pPr>
+            <a:r>
+              <a:rPr sz="1300" b="1">
+                <a:solidFill>
+                  <a:srgbClr val="933723"/>
+                </a:solidFill>
+                <a:latin typeface="Bahnschrift"/>
+              </a:rPr>
+              <a:t>WHAT IT DOES NOT</a:t>
+            </a:r>
+          </a:p>
+        </p:txBody>
+      </p:sp>
+      <p:sp>
+        <p:nvSpPr>
+          <p:cNvPr id="10" name="TextBox 9"/>
+          <p:cNvSpPr txBox="1"/>
+          <p:nvPr/>
+        </p:nvSpPr>
+        <p:spPr>
+          <a:xfrm>
+            <a:off x="6309360" y="3694176"/>
+            <a:ext cx="5394960" cy="1188720"/>
+          </a:xfrm>
+          <a:prstGeom prst="rect">
+            <a:avLst/>
+          </a:prstGeom>
+          <a:noFill/>
+        </p:spPr>
+        <p:txBody>
+          <a:bodyPr wrap="square" lIns="0" rIns="0" tIns="0" bIns="0" anchor="t">
+            <a:spAutoFit/>
+          </a:bodyPr>
+          <a:lstStyle/>
+          <a:p>
+            <a:pPr algn="l">
+              <a:spcBef>
+                <a:spcPts val="0"/>
+              </a:spcBef>
+              <a:spcAft>
+                <a:spcPts val="0"/>
+              </a:spcAft>
+            </a:pPr>
+            <a:r>
+              <a:rPr sz="950" b="0">
+                <a:solidFill>
+                  <a:srgbClr val="4A5764"/>
+                </a:solidFill>
+                <a:latin typeface="Consolas"/>
+              </a:rPr>
+              <a:t>telemetry is READ-ONLY. Injecting Taxl still goes</a:t>
+            </a:r>
+          </a:p>
+          <a:p>
+            <a:pPr algn="l">
+              <a:spcBef>
+                <a:spcPts val="0"/>
+              </a:spcBef>
+              <a:spcAft>
+                <a:spcPts val="0"/>
+              </a:spcAft>
+            </a:pPr>
+            <a:r>
+              <a:rPr sz="950" b="0">
+                <a:solidFill>
+                  <a:srgbClr val="4A5764"/>
+                </a:solidFill>
+                <a:latin typeface="Consolas"/>
+              </a:rPr>
+              <a:t>through apply_control -- one scalar throttle, split</a:t>
+            </a:r>
+          </a:p>
+          <a:p>
+            <a:pPr algn="l">
+              <a:spcBef>
+                <a:spcPts val="0"/>
+              </a:spcBef>
+              <a:spcAft>
+                <a:spcPts val="0"/>
+              </a:spcAft>
+            </a:pPr>
+            <a:r>
+              <a:rPr sz="950" b="0">
+                <a:solidFill>
+                  <a:srgbClr val="4A5764"/>
+                </a:solidFill>
+                <a:latin typeface="Consolas"/>
+              </a:rPr>
+              <a:t>by CARLA's differential.</a:t>
+            </a:r>
+          </a:p>
+          <a:p>
+            <a:pPr algn="l">
+              <a:spcBef>
+                <a:spcPts val="0"/>
+              </a:spcBef>
+              <a:spcAft>
+                <a:spcPts val="0"/>
+              </a:spcAft>
+            </a:pPr>
+            <a:r>
+              <a:rPr sz="950" b="0">
+                <a:solidFill>
+                  <a:srgbClr val="4A5764"/>
+                </a:solidFill>
+                <a:latin typeface="Consolas"/>
+              </a:rPr>
+              <a:t>So: measure per wheel, command lumped.</a:t>
+            </a:r>
+          </a:p>
+          <a:p>
+            <a:pPr algn="l">
+              <a:spcBef>
+                <a:spcPts val="0"/>
+              </a:spcBef>
+              <a:spcAft>
+                <a:spcPts val="0"/>
+              </a:spcAft>
+            </a:pPr>
+            <a:r>
+              <a:rPr sz="950" b="0">
+                <a:solidFill>
+                  <a:srgbClr val="4A5764"/>
+                </a:solidFill>
+                <a:latin typeface="Consolas"/>
+              </a:rPr>
+              <a:t>Per-wheel COMMAND still needs the SimpleWheeled fork.</a:t>
+            </a:r>
+          </a:p>
+        </p:txBody>
+      </p:sp>
+      <p:sp>
+        <p:nvSpPr>
+          <p:cNvPr id="11" name="Rectangle 10"/>
           <p:cNvSpPr/>
           <p:nvPr/>
         </p:nvSpPr>
         <p:spPr>
           <a:xfrm>
-            <a:off x="6236208" y="4773168"/>
-            <a:ext cx="5394960" cy="1097280"/>
+            <a:off x="566928" y="4992624"/>
+            <a:ext cx="11064240" cy="786384"/>
           </a:xfrm>
           <a:prstGeom prst="rect">
             <a:avLst/>
           </a:prstGeom>
           <a:solidFill>
-            <a:srgbClr val="F3DED8"/>
+            <a:srgbClr val="F4F6F7"/>
           </a:solidFill>
-          <a:ln w="19050">
+          <a:ln w="12700">
             <a:solidFill>
-              <a:srgbClr val="933723"/>
+              <a:srgbClr val="C7CED5"/>
             </a:solidFill>
           </a:ln>
           <a:effectLst/>
@@ -8063,31 +7527,73 @@
           </a:fontRef>
         </p:style>
         <p:txBody>
-          <a:bodyPr rtlCol="0" anchor="t" wrap="square" tIns="54864" bIns="54864"/>
-          <a:lstStyle/>
-          <a:p>
-            <a:pPr algn="ctr">
-              <a:spcBef>
-                <a:spcPts val="0"/>
-              </a:spcBef>
-              <a:spcAft>
-                <a:spcPts val="0"/>
-              </a:spcAft>
-            </a:pPr>
-            <a:r>
-              <a:rPr sz="1300" b="1">
-                <a:solidFill>
-                  <a:srgbClr val="933723"/>
-                </a:solidFill>
-                <a:latin typeface="Bahnschrift"/>
-              </a:rPr>
-              <a:t>THE ONE OPEN MEASUREMENT</a:t>
-            </a:r>
-          </a:p>
-          <a:p>
-            <a:pPr>
-              <a:spcBef>
-                <a:spcPts val="300"/>
+          <a:bodyPr rtlCol="0" anchor="t" wrap="square" tIns="91440" bIns="54864" lIns="146304"/>
+          <a:lstStyle/>
+          <a:p>
+            <a:pPr algn="l">
+              <a:spcBef>
+                <a:spcPts val="0"/>
+              </a:spcBef>
+              <a:spcAft>
+                <a:spcPts val="0"/>
+              </a:spcAft>
+            </a:pPr>
+            <a:r>
+              <a:rPr sz="1100" b="1">
+                <a:solidFill>
+                  <a:srgbClr val="A9611A"/>
+                </a:solidFill>
+                <a:latin typeface="Consolas"/>
+              </a:rPr>
+              <a:t>Taxl_i -&gt; pedal map -&gt; CARLA -&gt; get_telemetry_data().wheels[i].omega -&gt; w_cmd_i</a:t>
+            </a:r>
+          </a:p>
+          <a:p>
+            <a:pPr algn="l">
+              <a:spcBef>
+                <a:spcPts val="200"/>
+              </a:spcBef>
+              <a:spcAft>
+                <a:spcPts val="0"/>
+              </a:spcAft>
+            </a:pPr>
+            <a:r>
+              <a:rPr sz="1100" b="1">
+                <a:solidFill>
+                  <a:srgbClr val="A9611A"/>
+                </a:solidFill>
+                <a:latin typeface="Consolas"/>
+              </a:rPr>
+              <a:t>                                                     .wheels[i].torque -&gt; Trq_T2W_i</a:t>
+            </a:r>
+          </a:p>
+        </p:txBody>
+      </p:sp>
+      <p:sp>
+        <p:nvSpPr>
+          <p:cNvPr id="12" name="TextBox 11"/>
+          <p:cNvSpPr txBox="1"/>
+          <p:nvPr/>
+        </p:nvSpPr>
+        <p:spPr>
+          <a:xfrm>
+            <a:off x="566928" y="5907024"/>
+            <a:ext cx="11064240" cy="201168"/>
+          </a:xfrm>
+          <a:prstGeom prst="rect">
+            <a:avLst/>
+          </a:prstGeom>
+          <a:noFill/>
+        </p:spPr>
+        <p:txBody>
+          <a:bodyPr wrap="square" lIns="0" rIns="0" tIns="0" bIns="0" anchor="t">
+            <a:spAutoFit/>
+          </a:bodyPr>
+          <a:lstStyle/>
+          <a:p>
+            <a:pPr algn="l">
+              <a:spcBef>
+                <a:spcPts val="0"/>
               </a:spcBef>
               <a:spcAft>
                 <a:spcPts val="0"/>
@@ -8096,68 +7602,11 @@
             <a:r>
               <a:rPr sz="950" b="0">
                 <a:solidFill>
-                  <a:srgbClr val="4A5764"/>
-                </a:solidFill>
-                <a:latin typeface="Consolas"/>
-              </a:rPr>
-              <a:t>Two coastdowns to verify the drag area were</a:t>
-            </a:r>
-          </a:p>
-          <a:p>
-            <a:pPr>
-              <a:spcBef>
-                <a:spcPts val="100"/>
-              </a:spcBef>
-              <a:spcAft>
-                <a:spcPts val="0"/>
-              </a:spcAft>
-            </a:pPr>
-            <a:r>
-              <a:rPr sz="950" b="0">
-                <a:solidFill>
-                  <a:srgbClr val="4A5764"/>
-                </a:solidFill>
-                <a:latin typeface="Consolas"/>
-              </a:rPr>
-              <a:t>both contaminated -- the car left the road and</a:t>
-            </a:r>
-          </a:p>
-          <a:p>
-            <a:pPr>
-              <a:spcBef>
-                <a:spcPts val="100"/>
-              </a:spcBef>
-              <a:spcAft>
-                <a:spcPts val="0"/>
-              </a:spcAft>
-            </a:pPr>
-            <a:r>
-              <a:rPr sz="950" b="0">
-                <a:solidFill>
-                  <a:srgbClr val="4A5764"/>
-                </a:solidFill>
-                <a:latin typeface="Consolas"/>
-              </a:rPr>
-              <a:t>the fit returned a negative area. Needs a</a:t>
-            </a:r>
-          </a:p>
-          <a:p>
-            <a:pPr>
-              <a:spcBef>
-                <a:spcPts val="100"/>
-              </a:spcBef>
-              <a:spcAft>
-                <a:spcPts val="0"/>
-              </a:spcAft>
-            </a:pPr>
-            <a:r>
-              <a:rPr sz="950" b="0">
-                <a:solidFill>
-                  <a:srgbClr val="4A5764"/>
-                </a:solidFill>
-                <a:latin typeface="Consolas"/>
-              </a:rPr>
-              <a:t>collision sensor. Low stakes: ~213 N at 30 m/s.</a:t>
+                  <a:srgbClr val="1B646D"/>
+                </a:solidFill>
+                <a:latin typeface="Consolas"/>
+              </a:rPr>
+              <a:t>That is the CarMaker loop, per wheel, with no reconstruction and no fork. Upgrading is the highest-value action in this study.</a:t>
             </a:r>
           </a:p>
         </p:txBody>
